--- a/assets/pptx/catalog-454.pptx
+++ b/assets/pptx/catalog-454.pptx
@@ -3265,7 +3265,7 @@
                 <a:ea typeface="Ebrima"/>
                 <a:cs typeface="Ebrima"/>
               </a:rPr>
-              <a:t>እንዴት ዝም እላለሁ (2x)</a:t>
+              <a:t>እንዴት ዝም እላለሁ 2x</a:t>
             </a:r>
           </a:p>
           <a:p>
@@ -3301,7 +3301,7 @@
                 <a:ea typeface="Ebrima"/>
                 <a:cs typeface="Ebrima"/>
               </a:rPr>
-              <a:t>ቅኔ እየተቀኘሁ (2x)</a:t>
+              <a:t>ቅኔ እየተቀኘሁ 2x</a:t>
             </a:r>
           </a:p>
         </p:txBody>
@@ -3368,7 +3368,7 @@
                 <a:ea typeface="Ebrima"/>
                 <a:cs typeface="Ebrima"/>
               </a:rPr>
-              <a:t>ተመስገን ልበልህ ጌታ ኢየሱስ (2x)</a:t>
+              <a:t>ተመስገን ልበልህ ጌታ ኢየሱስ 2x</a:t>
             </a:r>
           </a:p>
           <a:p>
@@ -3386,7 +3386,7 @@
                 <a:ea typeface="Ebrima"/>
                 <a:cs typeface="Ebrima"/>
               </a:rPr>
-              <a:t>ተባረክ ልበልህ ጌታ ኢየሱስ (2x)</a:t>
+              <a:t>ተባረክ ልበልህ ጌታ ኢየሱስ 2x</a:t>
             </a:r>
           </a:p>
           <a:p>
@@ -3404,7 +3404,7 @@
                 <a:ea typeface="Ebrima"/>
                 <a:cs typeface="Ebrima"/>
               </a:rPr>
-              <a:t>ተወደስ ልበልህ ጌታ ኢየሱስ (2x)</a:t>
+              <a:t>ተወደስ ልበልህ ጌታ ኢየሱስ 2x</a:t>
             </a:r>
           </a:p>
         </p:txBody>
@@ -3592,7 +3592,7 @@
                 <a:ea typeface="Ebrima"/>
                 <a:cs typeface="Ebrima"/>
               </a:rPr>
-              <a:t>በዚህ እደነቃለሁ (2x)</a:t>
+              <a:t>በዚህ እደነቃለሁ 2x</a:t>
             </a:r>
           </a:p>
           <a:p>
@@ -3713,7 +3713,7 @@
                 <a:ea typeface="Ebrima"/>
                 <a:cs typeface="Ebrima"/>
               </a:rPr>
-              <a:t>ባንተ ተከበርኩኝ (2x)</a:t>
+              <a:t>ባንተ ተከበርኩኝ 2x</a:t>
             </a:r>
           </a:p>
           <a:p>
@@ -3749,7 +3749,7 @@
                 <a:ea typeface="Ebrima"/>
                 <a:cs typeface="Ebrima"/>
               </a:rPr>
-              <a:t>እኔም ወግ አየሁኝ (2x)</a:t>
+              <a:t>እኔም ወግ አየሁኝ 2x</a:t>
             </a:r>
           </a:p>
         </p:txBody>
@@ -3852,7 +3852,7 @@
                 <a:ea typeface="Ebrima"/>
                 <a:cs typeface="Ebrima"/>
               </a:rPr>
-              <a:t>ኦ ምስጋናዬን ላብዛብህ (3x)</a:t>
+              <a:t>ኦ ምስጋናዬን ላብዛብህ 3x</a:t>
             </a:r>
           </a:p>
           <a:p>
@@ -3870,7 +3870,7 @@
                 <a:ea typeface="Ebrima"/>
                 <a:cs typeface="Ebrima"/>
               </a:rPr>
-              <a:t>አሜን ምስጋናዬ ይብዛልህ (3x)</a:t>
+              <a:t>አሜን ምስጋናዬ ይብዛልህ 3x</a:t>
             </a:r>
           </a:p>
         </p:txBody>
